--- a/classes/parte-16-capstones-y-preparacion-de-certificaciones/303-capstone-laboratorio-completo-de-pentest/clase-303-presentacion.pptx
+++ b/classes/parte-16-capstones-y-preparacion-de-certificaciones/303-capstone-laboratorio-completo-de-pentest/clase-303-presentacion.pptx
@@ -17,6 +17,10 @@
     <p:sldId id="265" r:id="rId16"/>
     <p:sldId id="266" r:id="rId17"/>
     <p:sldId id="267" r:id="rId18"/>
+    <p:sldId id="268" r:id="rId19"/>
+    <p:sldId id="269" r:id="rId20"/>
+    <p:sldId id="270" r:id="rId21"/>
+    <p:sldId id="271" r:id="rId22"/>
   </p:sldIdLst>
   <p:sldSz cx="9144000" cy="6858000" type="screen4x3"/>
   <p:notesSz cx="6858000" cy="9144000"/>
@@ -3198,7 +3202,7 @@
                   <a:srgbClr val="0B3D2E"/>
                 </a:solidFill>
               </a:rPr>
-              <a:t>⚠️ Errores comunes</a:t>
+              <a:t>🧪 Laboratorio guiado</a:t>
             </a:r>
           </a:p>
         </p:txBody>
@@ -3236,67 +3240,97 @@
                   <a:srgbClr val="22282E"/>
                 </a:solidFill>
               </a:rPr>
-              <a:t>•  "El informe es solo comandos" — Falta contexto de riesgo; añade resumen ejecutivo y remediación.</a:t>
-            </a:r>
-          </a:p>
-          <a:p>
-            <a:pPr>
-              <a:spcAft>
-                <a:spcPts val="600"/>
-              </a:spcAft>
-            </a:pPr>
-            <a:r>
-              <a:rPr sz="1500">
-                <a:solidFill>
-                  <a:srgbClr val="22282E"/>
-                </a:solidFill>
-              </a:rPr>
-              <a:t>•  "No puedo llegar a la red interna" — Falta pivoting; configura túnel con ligolo/chisel.</a:t>
-            </a:r>
-          </a:p>
-          <a:p>
-            <a:pPr>
-              <a:spcAft>
-                <a:spcPts val="600"/>
-              </a:spcAft>
-            </a:pPr>
-            <a:r>
-              <a:rPr sz="1500">
-                <a:solidFill>
-                  <a:srgbClr val="22282E"/>
-                </a:solidFill>
-              </a:rPr>
-              <a:t>•  "BloodHound no muestra rutas" — Recolección incompleta; usa bloodhound-python -c All.</a:t>
-            </a:r>
-          </a:p>
-          <a:p>
-            <a:pPr>
-              <a:spcAft>
-                <a:spcPts val="600"/>
-              </a:spcAft>
-            </a:pPr>
-            <a:r>
-              <a:rPr sz="1500">
-                <a:solidFill>
-                  <a:srgbClr val="22282E"/>
-                </a:solidFill>
-              </a:rPr>
-              <a:t>•  "CVSS inflado" — Métricas mal elegidas; revisa vector de ataque y alcance real.</a:t>
-            </a:r>
-          </a:p>
-          <a:p>
-            <a:pPr>
-              <a:spcAft>
-                <a:spcPts val="600"/>
-              </a:spcAft>
-            </a:pPr>
-            <a:r>
-              <a:rPr sz="1500">
-                <a:solidFill>
-                  <a:srgbClr val="22282E"/>
-                </a:solidFill>
-              </a:rPr>
-              <a:t>•  "Rompí una VM" — Explotación agresiva sin snapshot; usa snapshots antes de cada fase.</a:t>
+              <a:t>•  Pre-engagement. Escribe un documento de alcance: IPs objetivo, ventana de tiempo, técnicas permitidas, objetivos ("obtener Domain Admin y exfiltrar flag.txt").</a:t>
+            </a:r>
+          </a:p>
+          <a:p>
+            <a:pPr>
+              <a:spcAft>
+                <a:spcPts val="600"/>
+              </a:spcAft>
+            </a:pPr>
+            <a:r>
+              <a:rPr sz="1500">
+                <a:solidFill>
+                  <a:srgbClr val="22282E"/>
+                </a:solidFill>
+              </a:rPr>
+              <a:t>•  Recon e intel. Enumera toda la red: nmap -p- --min-rate 2000 a cada host y -sVC a los puertos abiertos.</a:t>
+            </a:r>
+          </a:p>
+          <a:p>
+            <a:pPr>
+              <a:spcAft>
+                <a:spcPts val="600"/>
+              </a:spcAft>
+            </a:pPr>
+            <a:r>
+              <a:rPr sz="1500">
+                <a:solidFill>
+                  <a:srgbClr val="22282E"/>
+                </a:solidFill>
+              </a:rPr>
+              <a:t>•  Análisis de vulnerabilidades. Cruza servicios con searchsploit; identifica web (OWASP Top 10 de la Parte 6), SMB, y rutas AD.</a:t>
+            </a:r>
+          </a:p>
+          <a:p>
+            <a:pPr>
+              <a:spcAft>
+                <a:spcPts val="600"/>
+              </a:spcAft>
+            </a:pPr>
+            <a:r>
+              <a:rPr sz="1500">
+                <a:solidFill>
+                  <a:srgbClr val="22282E"/>
+                </a:solidFill>
+              </a:rPr>
+              <a:t>•  Explotación inicial. Consigue foothold en la máquina más expuesta; documenta el comando y captura evidencia.</a:t>
+            </a:r>
+          </a:p>
+          <a:p>
+            <a:pPr>
+              <a:spcAft>
+                <a:spcPts val="600"/>
+              </a:spcAft>
+            </a:pPr>
+            <a:r>
+              <a:rPr sz="1500">
+                <a:solidFill>
+                  <a:srgbClr val="22282E"/>
+                </a:solidFill>
+              </a:rPr>
+              <a:t>•  Pivoting. Levanta un túnel (ligolo-ng o chisel) hacia la red interna no enrutable.</a:t>
+            </a:r>
+          </a:p>
+          <a:p>
+            <a:pPr>
+              <a:spcAft>
+                <a:spcPts val="600"/>
+              </a:spcAft>
+            </a:pPr>
+            <a:r>
+              <a:rPr sz="1500">
+                <a:solidFill>
+                  <a:srgbClr val="22282E"/>
+                </a:solidFill>
+              </a:rPr>
+              <a:t>•  Ataque a Active Directory. Ejecuta bloodhound-python, analiza rutas de ataque, abusa de Kerberoasting/AS-REP y escala a Domain Admin con secretsdump.py.</a:t>
+            </a:r>
+          </a:p>
+          <a:p>
+            <a:pPr>
+              <a:spcAft>
+                <a:spcPts val="600"/>
+              </a:spcAft>
+            </a:pPr>
+            <a:r>
+              <a:rPr sz="1500">
+                <a:solidFill>
+                  <a:srgbClr val="22282E"/>
+                </a:solidFill>
+              </a:rPr>
+              <a:t>•  Post-explotación. Recolecta evidencia del objetivo (flag), sin causar daño ni persistencia innecesaria.</a:t>
             </a:r>
           </a:p>
         </p:txBody>
@@ -3347,7 +3381,7 @@
                   <a:srgbClr val="0B3D2E"/>
                 </a:solidFill>
               </a:rPr>
-              <a:t>❓ Preguntas frecuentes</a:t>
+              <a:t>✍️ Ejercicios</a:t>
             </a:r>
           </a:p>
         </p:txBody>
@@ -3385,97 +3419,82 @@
                   <a:srgbClr val="22282E"/>
                 </a:solidFill>
               </a:rPr>
-              <a:t>•  ❓ ¿Qué laboratorio uso si no tengo AD?</a:t>
-            </a:r>
-          </a:p>
-          <a:p>
-            <a:pPr>
-              <a:spcAft>
-                <a:spcPts val="600"/>
-              </a:spcAft>
-            </a:pPr>
-            <a:r>
-              <a:rPr sz="1500">
-                <a:solidFill>
-                  <a:srgbClr val="22282E"/>
-                </a:solidFill>
-              </a:rPr>
-              <a:t>•  Despliega GOAD (Game of Active Directory) o DetectionLab; son gratuitos y reproducibles.</a:t>
-            </a:r>
-          </a:p>
-          <a:p>
-            <a:pPr>
-              <a:spcAft>
-                <a:spcPts val="600"/>
-              </a:spcAft>
-            </a:pPr>
-            <a:r>
-              <a:rPr sz="1500">
-                <a:solidFill>
-                  <a:srgbClr val="22282E"/>
-                </a:solidFill>
-              </a:rPr>
-              <a:t>•  ❓ ¿Cuánto debe medir el informe?</a:t>
-            </a:r>
-          </a:p>
-          <a:p>
-            <a:pPr>
-              <a:spcAft>
-                <a:spcPts val="600"/>
-              </a:spcAft>
-            </a:pPr>
-            <a:r>
-              <a:rPr sz="1500">
-                <a:solidFill>
-                  <a:srgbClr val="22282E"/>
-                </a:solidFill>
-              </a:rPr>
-              <a:t>•  Lo necesario: un resumen ejecutivo breve y hallazgos detallados. Calidad sobre cantidad.</a:t>
-            </a:r>
-          </a:p>
-          <a:p>
-            <a:pPr>
-              <a:spcAft>
-                <a:spcPts val="600"/>
-              </a:spcAft>
-            </a:pPr>
-            <a:r>
-              <a:rPr sz="1500">
-                <a:solidFill>
-                  <a:srgbClr val="22282E"/>
-                </a:solidFill>
-              </a:rPr>
-              <a:t>•  ❓ ¿Incluyo hallazgos de bajo riesgo?</a:t>
-            </a:r>
-          </a:p>
-          <a:p>
-            <a:pPr>
-              <a:spcAft>
-                <a:spcPts val="600"/>
-              </a:spcAft>
-            </a:pPr>
-            <a:r>
-              <a:rPr sz="1500">
-                <a:solidFill>
-                  <a:srgbClr val="22282E"/>
-                </a:solidFill>
-              </a:rPr>
-              <a:t>•  Sí, pero priorizados. Un informe profesional cubre todo el espectro con severidad clara.</a:t>
-            </a:r>
-          </a:p>
-          <a:p>
-            <a:pPr>
-              <a:spcAft>
-                <a:spcPts val="600"/>
-              </a:spcAft>
-            </a:pPr>
-            <a:r>
-              <a:rPr sz="1500">
-                <a:solidFill>
-                  <a:srgbClr val="22282E"/>
-                </a:solidFill>
-              </a:rPr>
-              <a:t>•  ❓ ¿Este capstone sirve para el OSCP?</a:t>
+              <a:t>•  Redacta el documento de alcance y RoE de tu laboratorio.</a:t>
+            </a:r>
+          </a:p>
+          <a:p>
+            <a:pPr>
+              <a:spcAft>
+                <a:spcPts val="600"/>
+              </a:spcAft>
+            </a:pPr>
+            <a:r>
+              <a:rPr sz="1500">
+                <a:solidFill>
+                  <a:srgbClr val="22282E"/>
+                </a:solidFill>
+              </a:rPr>
+              <a:t>•  Genera un mapa de red con hosts, servicios y hallazgos.</a:t>
+            </a:r>
+          </a:p>
+          <a:p>
+            <a:pPr>
+              <a:spcAft>
+                <a:spcPts val="600"/>
+              </a:spcAft>
+            </a:pPr>
+            <a:r>
+              <a:rPr sz="1500">
+                <a:solidFill>
+                  <a:srgbClr val="22282E"/>
+                </a:solidFill>
+              </a:rPr>
+              <a:t>•  Puntúa tres hallazgos con CVSS y justifica cada métrica.</a:t>
+            </a:r>
+          </a:p>
+          <a:p>
+            <a:pPr>
+              <a:spcAft>
+                <a:spcPts val="600"/>
+              </a:spcAft>
+            </a:pPr>
+            <a:r>
+              <a:rPr sz="1500">
+                <a:solidFill>
+                  <a:srgbClr val="22282E"/>
+                </a:solidFill>
+              </a:rPr>
+              <a:t>•  Escribe el resumen ejecutivo (máx. media página, sin jerga).</a:t>
+            </a:r>
+          </a:p>
+          <a:p>
+            <a:pPr>
+              <a:spcAft>
+                <a:spcPts val="600"/>
+              </a:spcAft>
+            </a:pPr>
+            <a:r>
+              <a:rPr sz="1500">
+                <a:solidFill>
+                  <a:srgbClr val="22282E"/>
+                </a:solidFill>
+              </a:rPr>
+              <a:t>•  Documenta una cadena de ataque completa foothold → Domain Admin.</a:t>
+            </a:r>
+          </a:p>
+          <a:p>
+            <a:pPr>
+              <a:spcAft>
+                <a:spcPts val="600"/>
+              </a:spcAft>
+            </a:pPr>
+            <a:r>
+              <a:rPr sz="1500">
+                <a:solidFill>
+                  <a:srgbClr val="22282E"/>
+                </a:solidFill>
+              </a:rPr>
+              <a:t>•  Propón remediaciones priorizadas por coste/impacto.</a:t>
             </a:r>
           </a:p>
         </p:txBody>
@@ -3526,7 +3545,7 @@
                   <a:srgbClr val="0B3D2E"/>
                 </a:solidFill>
               </a:rPr>
-              <a:t>🔗 Referencias</a:t>
+              <a:t>📝 Reto verificable</a:t>
             </a:r>
           </a:p>
         </p:txBody>
@@ -3564,6 +3583,438 @@
                   <a:srgbClr val="22282E"/>
                 </a:solidFill>
               </a:rPr>
+              <a:t>•  Entrega un informe de pentest completo (informe-pentest.pdf o .md) del laboratorio, con al menos: alcance, metodología, 5 hallazgos con CVSS, una cadena de ataque hasta el objetivo final, y…</a:t>
+            </a:r>
+          </a:p>
+          <a:p>
+            <a:pPr>
+              <a:spcAft>
+                <a:spcPts val="600"/>
+              </a:spcAft>
+            </a:pPr>
+            <a:r>
+              <a:rPr sz="1500">
+                <a:solidFill>
+                  <a:srgbClr val="22282E"/>
+                </a:solidFill>
+              </a:rPr>
+              <a:t>•  Criterio de aceptación: el informe permite a un tercero reproducir cada hallazgo, cada CVSS es coherente con el vector descrito, hay un resumen ejecutivo sin jerga, y se alcanzó el objetivo definido…</a:t>
+            </a:r>
+          </a:p>
+        </p:txBody>
+      </p:sp>
+    </p:spTree>
+  </p:cSld>
+  <p:clrMapOvr>
+    <a:masterClrMapping/>
+  </p:clrMapOvr>
+</p:sld>
+</file>
+
+<file path=ppt/slides/slide13.xml><?xml version="1.0" encoding="utf-8"?>
+<p:sld xmlns:a="http://schemas.openxmlformats.org/drawingml/2006/main" xmlns:p="http://schemas.openxmlformats.org/presentationml/2006/main" xmlns:r="http://schemas.openxmlformats.org/officeDocument/2006/relationships">
+  <p:cSld>
+    <p:spTree>
+      <p:nvGrpSpPr>
+        <p:cNvPr id="1" name=""/>
+        <p:cNvGrpSpPr/>
+        <p:nvPr/>
+      </p:nvGrpSpPr>
+      <p:grpSpPr/>
+      <p:sp>
+        <p:nvSpPr>
+          <p:cNvPr id="2" name="TextBox 1"/>
+          <p:cNvSpPr txBox="1"/>
+          <p:nvPr/>
+        </p:nvSpPr>
+        <p:spPr>
+          <a:xfrm>
+            <a:off x="457200" y="320040"/>
+            <a:ext cx="8229600" cy="822960"/>
+          </a:xfrm>
+          <a:prstGeom prst="rect">
+            <a:avLst/>
+          </a:prstGeom>
+          <a:noFill/>
+        </p:spPr>
+        <p:txBody>
+          <a:bodyPr wrap="square">
+            <a:spAutoFit/>
+          </a:bodyPr>
+          <a:lstStyle/>
+          <a:p>
+            <a:r>
+              <a:rPr sz="2600" b="1">
+                <a:solidFill>
+                  <a:srgbClr val="0B3D2E"/>
+                </a:solidFill>
+              </a:rPr>
+              <a:t>⚠️ Errores comunes</a:t>
+            </a:r>
+          </a:p>
+        </p:txBody>
+      </p:sp>
+      <p:sp>
+        <p:nvSpPr>
+          <p:cNvPr id="3" name="TextBox 2"/>
+          <p:cNvSpPr txBox="1"/>
+          <p:nvPr/>
+        </p:nvSpPr>
+        <p:spPr>
+          <a:xfrm>
+            <a:off x="457200" y="1280160"/>
+            <a:ext cx="8229600" cy="4937760"/>
+          </a:xfrm>
+          <a:prstGeom prst="rect">
+            <a:avLst/>
+          </a:prstGeom>
+          <a:noFill/>
+        </p:spPr>
+        <p:txBody>
+          <a:bodyPr wrap="square">
+            <a:spAutoFit/>
+          </a:bodyPr>
+          <a:lstStyle/>
+          <a:p>
+            <a:pPr>
+              <a:spcAft>
+                <a:spcPts val="600"/>
+              </a:spcAft>
+            </a:pPr>
+            <a:r>
+              <a:rPr sz="1500">
+                <a:solidFill>
+                  <a:srgbClr val="22282E"/>
+                </a:solidFill>
+              </a:rPr>
+              <a:t>•  "El informe es solo comandos" — Falta contexto de riesgo; añade resumen ejecutivo y remediación.</a:t>
+            </a:r>
+          </a:p>
+          <a:p>
+            <a:pPr>
+              <a:spcAft>
+                <a:spcPts val="600"/>
+              </a:spcAft>
+            </a:pPr>
+            <a:r>
+              <a:rPr sz="1500">
+                <a:solidFill>
+                  <a:srgbClr val="22282E"/>
+                </a:solidFill>
+              </a:rPr>
+              <a:t>•  "No puedo llegar a la red interna" — Falta pivoting; configura túnel con ligolo/chisel.</a:t>
+            </a:r>
+          </a:p>
+          <a:p>
+            <a:pPr>
+              <a:spcAft>
+                <a:spcPts val="600"/>
+              </a:spcAft>
+            </a:pPr>
+            <a:r>
+              <a:rPr sz="1500">
+                <a:solidFill>
+                  <a:srgbClr val="22282E"/>
+                </a:solidFill>
+              </a:rPr>
+              <a:t>•  "BloodHound no muestra rutas" — Recolección incompleta; usa bloodhound-python -c All.</a:t>
+            </a:r>
+          </a:p>
+          <a:p>
+            <a:pPr>
+              <a:spcAft>
+                <a:spcPts val="600"/>
+              </a:spcAft>
+            </a:pPr>
+            <a:r>
+              <a:rPr sz="1500">
+                <a:solidFill>
+                  <a:srgbClr val="22282E"/>
+                </a:solidFill>
+              </a:rPr>
+              <a:t>•  "CVSS inflado" — Métricas mal elegidas; revisa vector de ataque y alcance real.</a:t>
+            </a:r>
+          </a:p>
+          <a:p>
+            <a:pPr>
+              <a:spcAft>
+                <a:spcPts val="600"/>
+              </a:spcAft>
+            </a:pPr>
+            <a:r>
+              <a:rPr sz="1500">
+                <a:solidFill>
+                  <a:srgbClr val="22282E"/>
+                </a:solidFill>
+              </a:rPr>
+              <a:t>•  "Rompí una VM" — Explotación agresiva sin snapshot; usa snapshots antes de cada fase.</a:t>
+            </a:r>
+          </a:p>
+        </p:txBody>
+      </p:sp>
+    </p:spTree>
+  </p:cSld>
+  <p:clrMapOvr>
+    <a:masterClrMapping/>
+  </p:clrMapOvr>
+</p:sld>
+</file>
+
+<file path=ppt/slides/slide14.xml><?xml version="1.0" encoding="utf-8"?>
+<p:sld xmlns:a="http://schemas.openxmlformats.org/drawingml/2006/main" xmlns:p="http://schemas.openxmlformats.org/presentationml/2006/main" xmlns:r="http://schemas.openxmlformats.org/officeDocument/2006/relationships">
+  <p:cSld>
+    <p:spTree>
+      <p:nvGrpSpPr>
+        <p:cNvPr id="1" name=""/>
+        <p:cNvGrpSpPr/>
+        <p:nvPr/>
+      </p:nvGrpSpPr>
+      <p:grpSpPr/>
+      <p:sp>
+        <p:nvSpPr>
+          <p:cNvPr id="2" name="TextBox 1"/>
+          <p:cNvSpPr txBox="1"/>
+          <p:nvPr/>
+        </p:nvSpPr>
+        <p:spPr>
+          <a:xfrm>
+            <a:off x="457200" y="320040"/>
+            <a:ext cx="8229600" cy="822960"/>
+          </a:xfrm>
+          <a:prstGeom prst="rect">
+            <a:avLst/>
+          </a:prstGeom>
+          <a:noFill/>
+        </p:spPr>
+        <p:txBody>
+          <a:bodyPr wrap="square">
+            <a:spAutoFit/>
+          </a:bodyPr>
+          <a:lstStyle/>
+          <a:p>
+            <a:r>
+              <a:rPr sz="2600" b="1">
+                <a:solidFill>
+                  <a:srgbClr val="0B3D2E"/>
+                </a:solidFill>
+              </a:rPr>
+              <a:t>❓ Preguntas frecuentes</a:t>
+            </a:r>
+          </a:p>
+        </p:txBody>
+      </p:sp>
+      <p:sp>
+        <p:nvSpPr>
+          <p:cNvPr id="3" name="TextBox 2"/>
+          <p:cNvSpPr txBox="1"/>
+          <p:nvPr/>
+        </p:nvSpPr>
+        <p:spPr>
+          <a:xfrm>
+            <a:off x="457200" y="1280160"/>
+            <a:ext cx="8229600" cy="4937760"/>
+          </a:xfrm>
+          <a:prstGeom prst="rect">
+            <a:avLst/>
+          </a:prstGeom>
+          <a:noFill/>
+        </p:spPr>
+        <p:txBody>
+          <a:bodyPr wrap="square">
+            <a:spAutoFit/>
+          </a:bodyPr>
+          <a:lstStyle/>
+          <a:p>
+            <a:pPr>
+              <a:spcAft>
+                <a:spcPts val="600"/>
+              </a:spcAft>
+            </a:pPr>
+            <a:r>
+              <a:rPr sz="1500">
+                <a:solidFill>
+                  <a:srgbClr val="22282E"/>
+                </a:solidFill>
+              </a:rPr>
+              <a:t>•  ❓ ¿Qué laboratorio uso si no tengo AD?</a:t>
+            </a:r>
+          </a:p>
+          <a:p>
+            <a:pPr>
+              <a:spcAft>
+                <a:spcPts val="600"/>
+              </a:spcAft>
+            </a:pPr>
+            <a:r>
+              <a:rPr sz="1500">
+                <a:solidFill>
+                  <a:srgbClr val="22282E"/>
+                </a:solidFill>
+              </a:rPr>
+              <a:t>•  Despliega GOAD (Game of Active Directory) o DetectionLab; son gratuitos y reproducibles.</a:t>
+            </a:r>
+          </a:p>
+          <a:p>
+            <a:pPr>
+              <a:spcAft>
+                <a:spcPts val="600"/>
+              </a:spcAft>
+            </a:pPr>
+            <a:r>
+              <a:rPr sz="1500">
+                <a:solidFill>
+                  <a:srgbClr val="22282E"/>
+                </a:solidFill>
+              </a:rPr>
+              <a:t>•  ❓ ¿Cuánto debe medir el informe?</a:t>
+            </a:r>
+          </a:p>
+          <a:p>
+            <a:pPr>
+              <a:spcAft>
+                <a:spcPts val="600"/>
+              </a:spcAft>
+            </a:pPr>
+            <a:r>
+              <a:rPr sz="1500">
+                <a:solidFill>
+                  <a:srgbClr val="22282E"/>
+                </a:solidFill>
+              </a:rPr>
+              <a:t>•  Lo necesario: un resumen ejecutivo breve y hallazgos detallados. Calidad sobre cantidad.</a:t>
+            </a:r>
+          </a:p>
+          <a:p>
+            <a:pPr>
+              <a:spcAft>
+                <a:spcPts val="600"/>
+              </a:spcAft>
+            </a:pPr>
+            <a:r>
+              <a:rPr sz="1500">
+                <a:solidFill>
+                  <a:srgbClr val="22282E"/>
+                </a:solidFill>
+              </a:rPr>
+              <a:t>•  ❓ ¿Incluyo hallazgos de bajo riesgo?</a:t>
+            </a:r>
+          </a:p>
+          <a:p>
+            <a:pPr>
+              <a:spcAft>
+                <a:spcPts val="600"/>
+              </a:spcAft>
+            </a:pPr>
+            <a:r>
+              <a:rPr sz="1500">
+                <a:solidFill>
+                  <a:srgbClr val="22282E"/>
+                </a:solidFill>
+              </a:rPr>
+              <a:t>•  Sí, pero priorizados. Un informe profesional cubre todo el espectro con severidad clara.</a:t>
+            </a:r>
+          </a:p>
+          <a:p>
+            <a:pPr>
+              <a:spcAft>
+                <a:spcPts val="600"/>
+              </a:spcAft>
+            </a:pPr>
+            <a:r>
+              <a:rPr sz="1500">
+                <a:solidFill>
+                  <a:srgbClr val="22282E"/>
+                </a:solidFill>
+              </a:rPr>
+              <a:t>•  ❓ ¿Este capstone sirve para el OSCP?</a:t>
+            </a:r>
+          </a:p>
+        </p:txBody>
+      </p:sp>
+    </p:spTree>
+  </p:cSld>
+  <p:clrMapOvr>
+    <a:masterClrMapping/>
+  </p:clrMapOvr>
+</p:sld>
+</file>
+
+<file path=ppt/slides/slide15.xml><?xml version="1.0" encoding="utf-8"?>
+<p:sld xmlns:a="http://schemas.openxmlformats.org/drawingml/2006/main" xmlns:p="http://schemas.openxmlformats.org/presentationml/2006/main" xmlns:r="http://schemas.openxmlformats.org/officeDocument/2006/relationships">
+  <p:cSld>
+    <p:spTree>
+      <p:nvGrpSpPr>
+        <p:cNvPr id="1" name=""/>
+        <p:cNvGrpSpPr/>
+        <p:nvPr/>
+      </p:nvGrpSpPr>
+      <p:grpSpPr/>
+      <p:sp>
+        <p:nvSpPr>
+          <p:cNvPr id="2" name="TextBox 1"/>
+          <p:cNvSpPr txBox="1"/>
+          <p:nvPr/>
+        </p:nvSpPr>
+        <p:spPr>
+          <a:xfrm>
+            <a:off x="457200" y="320040"/>
+            <a:ext cx="8229600" cy="822960"/>
+          </a:xfrm>
+          <a:prstGeom prst="rect">
+            <a:avLst/>
+          </a:prstGeom>
+          <a:noFill/>
+        </p:spPr>
+        <p:txBody>
+          <a:bodyPr wrap="square">
+            <a:spAutoFit/>
+          </a:bodyPr>
+          <a:lstStyle/>
+          <a:p>
+            <a:r>
+              <a:rPr sz="2600" b="1">
+                <a:solidFill>
+                  <a:srgbClr val="0B3D2E"/>
+                </a:solidFill>
+              </a:rPr>
+              <a:t>🔗 Referencias</a:t>
+            </a:r>
+          </a:p>
+        </p:txBody>
+      </p:sp>
+      <p:sp>
+        <p:nvSpPr>
+          <p:cNvPr id="3" name="TextBox 2"/>
+          <p:cNvSpPr txBox="1"/>
+          <p:nvPr/>
+        </p:nvSpPr>
+        <p:spPr>
+          <a:xfrm>
+            <a:off x="457200" y="1280160"/>
+            <a:ext cx="8229600" cy="4937760"/>
+          </a:xfrm>
+          <a:prstGeom prst="rect">
+            <a:avLst/>
+          </a:prstGeom>
+          <a:noFill/>
+        </p:spPr>
+        <p:txBody>
+          <a:bodyPr wrap="square">
+            <a:spAutoFit/>
+          </a:bodyPr>
+          <a:lstStyle/>
+          <a:p>
+            <a:pPr>
+              <a:spcAft>
+                <a:spcPts val="600"/>
+              </a:spcAft>
+            </a:pPr>
+            <a:r>
+              <a:rPr sz="1500">
+                <a:solidFill>
+                  <a:srgbClr val="22282E"/>
+                </a:solidFill>
+              </a:rPr>
               <a:t>•  NIST SP 800-115: &lt;https://csrc.nist.gov/pubs/sp/800/115/final&gt;</a:t>
             </a:r>
           </a:p>
@@ -3629,6 +4080,81 @@
           </a:p>
         </p:txBody>
       </p:sp>
+    </p:spTree>
+  </p:cSld>
+  <p:clrMapOvr>
+    <a:masterClrMapping/>
+  </p:clrMapOvr>
+</p:sld>
+</file>
+
+<file path=ppt/slides/slide16.xml><?xml version="1.0" encoding="utf-8"?>
+<p:sld xmlns:a="http://schemas.openxmlformats.org/drawingml/2006/main" xmlns:p="http://schemas.openxmlformats.org/presentationml/2006/main" xmlns:r="http://schemas.openxmlformats.org/officeDocument/2006/relationships">
+  <p:cSld>
+    <p:spTree>
+      <p:nvGrpSpPr>
+        <p:cNvPr id="1" name=""/>
+        <p:cNvGrpSpPr/>
+        <p:nvPr/>
+      </p:nvGrpSpPr>
+      <p:grpSpPr/>
+      <p:sp>
+        <p:nvSpPr>
+          <p:cNvPr id="2" name="TextBox 1"/>
+          <p:cNvSpPr txBox="1"/>
+          <p:nvPr/>
+        </p:nvSpPr>
+        <p:spPr>
+          <a:xfrm>
+            <a:off x="457200" y="274320"/>
+            <a:ext cx="8229600" cy="640080"/>
+          </a:xfrm>
+          <a:prstGeom prst="rect">
+            <a:avLst/>
+          </a:prstGeom>
+          <a:noFill/>
+        </p:spPr>
+        <p:txBody>
+          <a:bodyPr wrap="square">
+            <a:spAutoFit/>
+          </a:bodyPr>
+          <a:lstStyle/>
+          <a:p>
+            <a:r>
+              <a:rPr sz="2200" b="1">
+                <a:solidFill>
+                  <a:srgbClr val="0B3D2E"/>
+                </a:solidFill>
+              </a:rPr>
+              <a:t>Diagrama de la clase</a:t>
+            </a:r>
+          </a:p>
+        </p:txBody>
+      </p:sp>
+      <p:pic>
+        <p:nvPicPr>
+          <p:cNvPr id="3" name="Picture 2" descr="def1111f1d98707b.png"/>
+          <p:cNvPicPr>
+            <a:picLocks noChangeAspect="1"/>
+          </p:cNvPicPr>
+          <p:nvPr/>
+        </p:nvPicPr>
+        <p:blipFill>
+          <a:blip r:embed="rId2"/>
+          <a:stretch>
+            <a:fillRect/>
+          </a:stretch>
+        </p:blipFill>
+        <p:spPr>
+          <a:xfrm>
+            <a:off x="457200" y="3287444"/>
+            <a:ext cx="8229600" cy="923192"/>
+          </a:xfrm>
+          <a:prstGeom prst="rect">
+            <a:avLst/>
+          </a:prstGeom>
+        </p:spPr>
+      </p:pic>
     </p:spTree>
   </p:cSld>
   <p:clrMapOvr>
@@ -3713,7 +4239,7 @@
                   <a:srgbClr val="22282E"/>
                 </a:solidFill>
               </a:rPr>
-              <a:t>•  Ejecutar un pentest end-to-end contra un laboratorio propio multi-máquina, siguiendo una metodología profesional (PTES / NIST SP 800-115) y entregando un informe formal con hallazgos, puntuación CVSS y recomendaciones de remediación. Este capstone integra las Partes 6 (web), 7 (redes/infra), 8 (Active Directory) y 9 (post-explotación) en un único proyecto verificable.</a:t>
+              <a:t>•  Ejecutar un pentest end-to-end contra un laboratorio propio multi-máquina, siguiendo una metodología profesional (PTES / NIST SP 800-115) y entregando un informe formal con hallazgos, puntuación CVSS…</a:t>
             </a:r>
           </a:p>
         </p:txBody>
@@ -4107,7 +4633,7 @@
                   <a:srgbClr val="0B3D2E"/>
                 </a:solidFill>
               </a:rPr>
-              <a:t>📖 Definiciones y características</a:t>
+              <a:t>🧠 Explicación en profundidad</a:t>
             </a:r>
           </a:p>
         </p:txBody>
@@ -4145,82 +4671,22 @@
                   <a:srgbClr val="22282E"/>
                 </a:solidFill>
               </a:rPr>
-              <a:t>•  Alcance (scope): activos y técnicas autorizadas. Característica: todo lo fuera de alcance está prohibido.</a:t>
-            </a:r>
-          </a:p>
-          <a:p>
-            <a:pPr>
-              <a:spcAft>
-                <a:spcPts val="600"/>
-              </a:spcAft>
-            </a:pPr>
-            <a:r>
-              <a:rPr sz="1500">
-                <a:solidFill>
-                  <a:srgbClr val="22282E"/>
-                </a:solidFill>
-              </a:rPr>
-              <a:t>•  Reglas de enfrentamiento (RoE): horarios, límites, contactos de emergencia. Característica: evitan incidentes y disputas legales.</a:t>
-            </a:r>
-          </a:p>
-          <a:p>
-            <a:pPr>
-              <a:spcAft>
-                <a:spcPts val="600"/>
-              </a:spcAft>
-            </a:pPr>
-            <a:r>
-              <a:rPr sz="1500">
-                <a:solidFill>
-                  <a:srgbClr val="22282E"/>
-                </a:solidFill>
-              </a:rPr>
-              <a:t>•  PTES: estándar de 7 fases (pre-engagement, intel, modelado de amenazas, análisis de vulnerabilidades, explotación, post-explotación, reporte). Característica: marco reproducible.</a:t>
-            </a:r>
-          </a:p>
-          <a:p>
-            <a:pPr>
-              <a:spcAft>
-                <a:spcPts val="600"/>
-              </a:spcAft>
-            </a:pPr>
-            <a:r>
-              <a:rPr sz="1500">
-                <a:solidFill>
-                  <a:srgbClr val="22282E"/>
-                </a:solidFill>
-              </a:rPr>
-              <a:t>•  CVSS 3.1: sistema de puntuación de severidad 0–10. Característica: separa base, temporal y ambiental.</a:t>
-            </a:r>
-          </a:p>
-          <a:p>
-            <a:pPr>
-              <a:spcAft>
-                <a:spcPts val="600"/>
-              </a:spcAft>
-            </a:pPr>
-            <a:r>
-              <a:rPr sz="1500">
-                <a:solidFill>
-                  <a:srgbClr val="22282E"/>
-                </a:solidFill>
-              </a:rPr>
-              <a:t>•  Resumen ejecutivo: sección para directivos sin jerga. Característica: enfoca riesgo de negocio, no comandos.</a:t>
-            </a:r>
-          </a:p>
-          <a:p>
-            <a:pPr>
-              <a:spcAft>
-                <a:spcPts val="600"/>
-              </a:spcAft>
-            </a:pPr>
-            <a:r>
-              <a:rPr sz="1500">
-                <a:solidFill>
-                  <a:srgbClr val="22282E"/>
-                </a:solidFill>
-              </a:rPr>
-              <a:t>•  Retest: verificación de que las remediaciones funcionan. Característica: cierra el ciclo.</a:t>
+              <a:t>•  Un pentest completo enlaza autorización, modelado, descubrimiento, validación, impacto, remediación y retest. La clase convierte el objetivo en una evidencia evaluable, declara supuestos y reserva…</a:t>
+            </a:r>
+          </a:p>
+          <a:p>
+            <a:pPr>
+              <a:spcAft>
+                <a:spcPts val="600"/>
+              </a:spcAft>
+            </a:pPr>
+            <a:r>
+              <a:rPr sz="1500">
+                <a:solidFill>
+                  <a:srgbClr val="22282E"/>
+                </a:solidFill>
+              </a:rPr>
+              <a:t>•  Una vulnerabilidad técnica queda fuera de alcance. Se registra y escala sin explotarla; disciplina de alcance forma parte del resultado.</a:t>
             </a:r>
           </a:p>
         </p:txBody>
@@ -4271,7 +4737,7 @@
                   <a:srgbClr val="0B3D2E"/>
                 </a:solidFill>
               </a:rPr>
-              <a:t>🧰 Herramientas y preparación</a:t>
+              <a:t>📔 Glosario operativo</a:t>
             </a:r>
           </a:p>
         </p:txBody>
@@ -4309,67 +4775,52 @@
                   <a:srgbClr val="22282E"/>
                 </a:solidFill>
               </a:rPr>
-              <a:t>•  Laboratorio: 3–5 VMs (mezcla de VulnHub + un rango AD tipo GOAD o DetectionLab).</a:t>
-            </a:r>
-          </a:p>
-          <a:p>
-            <a:pPr>
-              <a:spcAft>
-                <a:spcPts val="600"/>
-              </a:spcAft>
-            </a:pPr>
-            <a:r>
-              <a:rPr sz="1500">
-                <a:solidFill>
-                  <a:srgbClr val="22282E"/>
-                </a:solidFill>
-              </a:rPr>
-              <a:t>•  Recon/explotación: nmap, autorecon, ffuf, BloodHound, impacket, CrackMapExec, Metasploit.</a:t>
-            </a:r>
-          </a:p>
-          <a:p>
-            <a:pPr>
-              <a:spcAft>
-                <a:spcPts val="600"/>
-              </a:spcAft>
-            </a:pPr>
-            <a:r>
-              <a:rPr sz="1500">
-                <a:solidFill>
-                  <a:srgbClr val="22282E"/>
-                </a:solidFill>
-              </a:rPr>
-              <a:t>•  Post-explotación: mimikatz, secretsdump.py, chisel/ligolo para pivoting.</a:t>
-            </a:r>
-          </a:p>
-          <a:p>
-            <a:pPr>
-              <a:spcAft>
-                <a:spcPts val="600"/>
-              </a:spcAft>
-            </a:pPr>
-            <a:r>
-              <a:rPr sz="1500">
-                <a:solidFill>
-                  <a:srgbClr val="22282E"/>
-                </a:solidFill>
-              </a:rPr>
-              <a:t>•  Gestión: Obsidian/CherryTree para notas, plantilla de informe (Markdown o Word).</a:t>
-            </a:r>
-          </a:p>
-          <a:p>
-            <a:pPr>
-              <a:spcAft>
-                <a:spcPts val="600"/>
-              </a:spcAft>
-            </a:pPr>
-            <a:r>
-              <a:rPr sz="1500">
-                <a:solidFill>
-                  <a:srgbClr val="22282E"/>
-                </a:solidFill>
-              </a:rPr>
-              <a:t>•  CVSS calculator (FIRST.org).</a:t>
+              <a:t>•  Término — Definición</a:t>
+            </a:r>
+          </a:p>
+          <a:p>
+            <a:pPr>
+              <a:spcAft>
+                <a:spcPts val="600"/>
+              </a:spcAft>
+            </a:pPr>
+            <a:r>
+              <a:rPr sz="1500">
+                <a:solidFill>
+                  <a:srgbClr val="22282E"/>
+                </a:solidFill>
+              </a:rPr>
+              <a:t>•  Rules of engagement — Reglas de autorización, tiempo, objetivos y parada.</a:t>
+            </a:r>
+          </a:p>
+          <a:p>
+            <a:pPr>
+              <a:spcAft>
+                <a:spcPts val="600"/>
+              </a:spcAft>
+            </a:pPr>
+            <a:r>
+              <a:rPr sz="1500">
+                <a:solidFill>
+                  <a:srgbClr val="22282E"/>
+                </a:solidFill>
+              </a:rPr>
+              <a:t>•  Evidencia — Resultado que otra persona puede revisar y relacionar con un criterio.</a:t>
+            </a:r>
+          </a:p>
+          <a:p>
+            <a:pPr>
+              <a:spcAft>
+                <a:spcPts val="600"/>
+              </a:spcAft>
+            </a:pPr>
+            <a:r>
+              <a:rPr sz="1500">
+                <a:solidFill>
+                  <a:srgbClr val="22282E"/>
+                </a:solidFill>
+              </a:rPr>
+              <a:t>•  Retrospectiva — Revisión de decisiones, límites y siguiente mejora.</a:t>
             </a:r>
           </a:p>
         </p:txBody>
@@ -4420,7 +4871,7 @@
                   <a:srgbClr val="0B3D2E"/>
                 </a:solidFill>
               </a:rPr>
-              <a:t>🧪 Laboratorio guiado</a:t>
+              <a:t>✅ Criterio de dominio</a:t>
             </a:r>
           </a:p>
         </p:txBody>
@@ -4458,97 +4909,7 @@
                   <a:srgbClr val="22282E"/>
                 </a:solidFill>
               </a:rPr>
-              <a:t>•  Pre-engagement. Escribe un documento de alcance: IPs objetivo, ventana de tiempo, técnicas permitidas, objetivos ("obtener Domain Admin y exfiltrar flag.txt").</a:t>
-            </a:r>
-          </a:p>
-          <a:p>
-            <a:pPr>
-              <a:spcAft>
-                <a:spcPts val="600"/>
-              </a:spcAft>
-            </a:pPr>
-            <a:r>
-              <a:rPr sz="1500">
-                <a:solidFill>
-                  <a:srgbClr val="22282E"/>
-                </a:solidFill>
-              </a:rPr>
-              <a:t>•  Recon e intel. Enumera toda la red: nmap -p- --min-rate 2000 a cada host y -sVC a los puertos abiertos.</a:t>
-            </a:r>
-          </a:p>
-          <a:p>
-            <a:pPr>
-              <a:spcAft>
-                <a:spcPts val="600"/>
-              </a:spcAft>
-            </a:pPr>
-            <a:r>
-              <a:rPr sz="1500">
-                <a:solidFill>
-                  <a:srgbClr val="22282E"/>
-                </a:solidFill>
-              </a:rPr>
-              <a:t>•  Análisis de vulnerabilidades. Cruza servicios con searchsploit; identifica web (OWASP Top 10 de la Parte 6), SMB, y rutas AD.</a:t>
-            </a:r>
-          </a:p>
-          <a:p>
-            <a:pPr>
-              <a:spcAft>
-                <a:spcPts val="600"/>
-              </a:spcAft>
-            </a:pPr>
-            <a:r>
-              <a:rPr sz="1500">
-                <a:solidFill>
-                  <a:srgbClr val="22282E"/>
-                </a:solidFill>
-              </a:rPr>
-              <a:t>•  Explotación inicial. Consigue foothold en la máquina más expuesta; documenta el comando y captura evidencia.</a:t>
-            </a:r>
-          </a:p>
-          <a:p>
-            <a:pPr>
-              <a:spcAft>
-                <a:spcPts val="600"/>
-              </a:spcAft>
-            </a:pPr>
-            <a:r>
-              <a:rPr sz="1500">
-                <a:solidFill>
-                  <a:srgbClr val="22282E"/>
-                </a:solidFill>
-              </a:rPr>
-              <a:t>•  Pivoting. Levanta un túnel (ligolo-ng o chisel) hacia la red interna no enrutable.</a:t>
-            </a:r>
-          </a:p>
-          <a:p>
-            <a:pPr>
-              <a:spcAft>
-                <a:spcPts val="600"/>
-              </a:spcAft>
-            </a:pPr>
-            <a:r>
-              <a:rPr sz="1500">
-                <a:solidFill>
-                  <a:srgbClr val="22282E"/>
-                </a:solidFill>
-              </a:rPr>
-              <a:t>•  Ataque a Active Directory. Ejecuta bloodhound-python, analiza rutas de ataque, abusa de Kerberoasting/AS-REP y escala a Domain Admin con secretsdump.py.</a:t>
-            </a:r>
-          </a:p>
-          <a:p>
-            <a:pPr>
-              <a:spcAft>
-                <a:spcPts val="600"/>
-              </a:spcAft>
-            </a:pPr>
-            <a:r>
-              <a:rPr sz="1500">
-                <a:solidFill>
-                  <a:srgbClr val="22282E"/>
-                </a:solidFill>
-              </a:rPr>
-              <a:t>•  Post-explotación. Recolecta evidencia del objetivo (flag), sin causar daño ni persistencia innecesaria.</a:t>
+              <a:t>•  El alumno domina la clase cuando planifica, ejecuta y comunica una evidencia completa, respeta alcance y puede defender sus decisiones ante una revisión.</a:t>
             </a:r>
           </a:p>
         </p:txBody>
@@ -4599,7 +4960,7 @@
                   <a:srgbClr val="0B3D2E"/>
                 </a:solidFill>
               </a:rPr>
-              <a:t>✍️ Ejercicios</a:t>
+              <a:t>📖 Definiciones y características</a:t>
             </a:r>
           </a:p>
         </p:txBody>
@@ -4637,82 +4998,82 @@
                   <a:srgbClr val="22282E"/>
                 </a:solidFill>
               </a:rPr>
-              <a:t>•  Redacta el documento de alcance y RoE de tu laboratorio.</a:t>
-            </a:r>
-          </a:p>
-          <a:p>
-            <a:pPr>
-              <a:spcAft>
-                <a:spcPts val="600"/>
-              </a:spcAft>
-            </a:pPr>
-            <a:r>
-              <a:rPr sz="1500">
-                <a:solidFill>
-                  <a:srgbClr val="22282E"/>
-                </a:solidFill>
-              </a:rPr>
-              <a:t>•  Genera un mapa de red con hosts, servicios y hallazgos.</a:t>
-            </a:r>
-          </a:p>
-          <a:p>
-            <a:pPr>
-              <a:spcAft>
-                <a:spcPts val="600"/>
-              </a:spcAft>
-            </a:pPr>
-            <a:r>
-              <a:rPr sz="1500">
-                <a:solidFill>
-                  <a:srgbClr val="22282E"/>
-                </a:solidFill>
-              </a:rPr>
-              <a:t>•  Puntúa tres hallazgos con CVSS y justifica cada métrica.</a:t>
-            </a:r>
-          </a:p>
-          <a:p>
-            <a:pPr>
-              <a:spcAft>
-                <a:spcPts val="600"/>
-              </a:spcAft>
-            </a:pPr>
-            <a:r>
-              <a:rPr sz="1500">
-                <a:solidFill>
-                  <a:srgbClr val="22282E"/>
-                </a:solidFill>
-              </a:rPr>
-              <a:t>•  Escribe el resumen ejecutivo (máx. media página, sin jerga).</a:t>
-            </a:r>
-          </a:p>
-          <a:p>
-            <a:pPr>
-              <a:spcAft>
-                <a:spcPts val="600"/>
-              </a:spcAft>
-            </a:pPr>
-            <a:r>
-              <a:rPr sz="1500">
-                <a:solidFill>
-                  <a:srgbClr val="22282E"/>
-                </a:solidFill>
-              </a:rPr>
-              <a:t>•  Documenta una cadena de ataque completa foothold → Domain Admin.</a:t>
-            </a:r>
-          </a:p>
-          <a:p>
-            <a:pPr>
-              <a:spcAft>
-                <a:spcPts val="600"/>
-              </a:spcAft>
-            </a:pPr>
-            <a:r>
-              <a:rPr sz="1500">
-                <a:solidFill>
-                  <a:srgbClr val="22282E"/>
-                </a:solidFill>
-              </a:rPr>
-              <a:t>•  Propón remediaciones priorizadas por coste/impacto.</a:t>
+              <a:t>•  Alcance (scope): activos y técnicas autorizadas. Característica: todo lo fuera de alcance está prohibido.</a:t>
+            </a:r>
+          </a:p>
+          <a:p>
+            <a:pPr>
+              <a:spcAft>
+                <a:spcPts val="600"/>
+              </a:spcAft>
+            </a:pPr>
+            <a:r>
+              <a:rPr sz="1500">
+                <a:solidFill>
+                  <a:srgbClr val="22282E"/>
+                </a:solidFill>
+              </a:rPr>
+              <a:t>•  Reglas de enfrentamiento (RoE): horarios, límites, contactos de emergencia. Característica: evitan incidentes y disputas legales.</a:t>
+            </a:r>
+          </a:p>
+          <a:p>
+            <a:pPr>
+              <a:spcAft>
+                <a:spcPts val="600"/>
+              </a:spcAft>
+            </a:pPr>
+            <a:r>
+              <a:rPr sz="1500">
+                <a:solidFill>
+                  <a:srgbClr val="22282E"/>
+                </a:solidFill>
+              </a:rPr>
+              <a:t>•  PTES: estándar de 7 fases (pre-engagement, intel, modelado de amenazas, análisis de vulnerabilidades, explotación, post-explotación, reporte). Característica: marco reproducible.</a:t>
+            </a:r>
+          </a:p>
+          <a:p>
+            <a:pPr>
+              <a:spcAft>
+                <a:spcPts val="600"/>
+              </a:spcAft>
+            </a:pPr>
+            <a:r>
+              <a:rPr sz="1500">
+                <a:solidFill>
+                  <a:srgbClr val="22282E"/>
+                </a:solidFill>
+              </a:rPr>
+              <a:t>•  CVSS 3.1: sistema de puntuación de severidad 0–10. Característica: separa base, temporal y ambiental.</a:t>
+            </a:r>
+          </a:p>
+          <a:p>
+            <a:pPr>
+              <a:spcAft>
+                <a:spcPts val="600"/>
+              </a:spcAft>
+            </a:pPr>
+            <a:r>
+              <a:rPr sz="1500">
+                <a:solidFill>
+                  <a:srgbClr val="22282E"/>
+                </a:solidFill>
+              </a:rPr>
+              <a:t>•  Resumen ejecutivo: sección para directivos sin jerga. Característica: enfoca riesgo de negocio, no comandos.</a:t>
+            </a:r>
+          </a:p>
+          <a:p>
+            <a:pPr>
+              <a:spcAft>
+                <a:spcPts val="600"/>
+              </a:spcAft>
+            </a:pPr>
+            <a:r>
+              <a:rPr sz="1500">
+                <a:solidFill>
+                  <a:srgbClr val="22282E"/>
+                </a:solidFill>
+              </a:rPr>
+              <a:t>•  Retest: verificación de que las remediaciones funcionan. Característica: cierra el ciclo.</a:t>
             </a:r>
           </a:p>
         </p:txBody>
@@ -4763,7 +5124,7 @@
                   <a:srgbClr val="0B3D2E"/>
                 </a:solidFill>
               </a:rPr>
-              <a:t>📝 Reto verificable</a:t>
+              <a:t>🧰 Herramientas y preparación</a:t>
             </a:r>
           </a:p>
         </p:txBody>
@@ -4801,22 +5162,67 @@
                   <a:srgbClr val="22282E"/>
                 </a:solidFill>
               </a:rPr>
-              <a:t>•  Entrega un informe de pentest completo (informe-pentest.pdf o .md) del laboratorio, con al menos: alcance, metodología, 5 hallazgos con CVSS, una cadena de ataque hasta el objetivo final, y recomendaciones. Adjunta el cuaderno de notas con evidencias.</a:t>
-            </a:r>
-          </a:p>
-          <a:p>
-            <a:pPr>
-              <a:spcAft>
-                <a:spcPts val="600"/>
-              </a:spcAft>
-            </a:pPr>
-            <a:r>
-              <a:rPr sz="1500">
-                <a:solidFill>
-                  <a:srgbClr val="22282E"/>
-                </a:solidFill>
-              </a:rPr>
-              <a:t>•  Criterio de aceptación: el informe permite a un tercero reproducir cada hallazgo, cada CVSS es coherente con el vector descrito, hay un resumen ejecutivo sin jerga, y se alcanzó el objetivo definido en el alcance (p. ej. Domain Admin + flag).</a:t>
+              <a:t>•  Laboratorio: 3–5 VMs (mezcla de VulnHub + un rango AD tipo GOAD o DetectionLab).</a:t>
+            </a:r>
+          </a:p>
+          <a:p>
+            <a:pPr>
+              <a:spcAft>
+                <a:spcPts val="600"/>
+              </a:spcAft>
+            </a:pPr>
+            <a:r>
+              <a:rPr sz="1500">
+                <a:solidFill>
+                  <a:srgbClr val="22282E"/>
+                </a:solidFill>
+              </a:rPr>
+              <a:t>•  Recon/explotación: nmap, autorecon, ffuf, BloodHound, impacket, CrackMapExec, Metasploit.</a:t>
+            </a:r>
+          </a:p>
+          <a:p>
+            <a:pPr>
+              <a:spcAft>
+                <a:spcPts val="600"/>
+              </a:spcAft>
+            </a:pPr>
+            <a:r>
+              <a:rPr sz="1500">
+                <a:solidFill>
+                  <a:srgbClr val="22282E"/>
+                </a:solidFill>
+              </a:rPr>
+              <a:t>•  Post-explotación: mimikatz, secretsdump.py, chisel/ligolo para pivoting.</a:t>
+            </a:r>
+          </a:p>
+          <a:p>
+            <a:pPr>
+              <a:spcAft>
+                <a:spcPts val="600"/>
+              </a:spcAft>
+            </a:pPr>
+            <a:r>
+              <a:rPr sz="1500">
+                <a:solidFill>
+                  <a:srgbClr val="22282E"/>
+                </a:solidFill>
+              </a:rPr>
+              <a:t>•  Gestión: Obsidian/CherryTree para notas, plantilla de informe (Markdown o Word).</a:t>
+            </a:r>
+          </a:p>
+          <a:p>
+            <a:pPr>
+              <a:spcAft>
+                <a:spcPts val="600"/>
+              </a:spcAft>
+            </a:pPr>
+            <a:r>
+              <a:rPr sz="1500">
+                <a:solidFill>
+                  <a:srgbClr val="22282E"/>
+                </a:solidFill>
+              </a:rPr>
+              <a:t>•  CVSS calculator (FIRST.org).</a:t>
             </a:r>
           </a:p>
         </p:txBody>
